--- a/Topic_A/Guided_Practice/AT-A-L06_Writing_Practice_Room_Healthy_Eating_and_Lifestyle_Choices.pptx
+++ b/Topic_A/Guided_Practice/AT-A-L06_Writing_Practice_Room_Healthy_Eating_and_Lifestyle_Choices.pptx
@@ -21897,7 +21897,7 @@
                 <a:solidFill>
                   <a:srgbClr val="FFFFFF"/>
                 </a:solidFill>
-                <a:latin typeface="Calibri" pitchFamily="34" charset="0"/>
+                <a:latin typeface="Amiri" pitchFamily="2" charset="-78"/>
                 <a:ea typeface="Amiri" pitchFamily="2" charset="-78"/>
                 <a:cs typeface="Amiri" pitchFamily="2" charset="-78"/>
               </a:rPr>
@@ -21963,7 +21963,7 @@
                 <a:solidFill>
                   <a:srgbClr val="FFFFFF"/>
                 </a:solidFill>
-                <a:latin typeface="Calibri" pitchFamily="34" charset="0"/>
+                <a:latin typeface="Amiri" pitchFamily="2" charset="-78"/>
                 <a:ea typeface="Amiri" pitchFamily="2" charset="-78"/>
                 <a:cs typeface="Amiri" pitchFamily="2" charset="-78"/>
               </a:rPr>
@@ -22029,7 +22029,7 @@
                 <a:solidFill>
                   <a:srgbClr val="FFFFFF"/>
                 </a:solidFill>
-                <a:latin typeface="Calibri" pitchFamily="34" charset="0"/>
+                <a:latin typeface="Amiri" pitchFamily="2" charset="-78"/>
                 <a:ea typeface="Amiri" pitchFamily="2" charset="-78"/>
                 <a:cs typeface="Amiri" pitchFamily="2" charset="-78"/>
               </a:rPr>
@@ -22095,7 +22095,7 @@
                 <a:solidFill>
                   <a:srgbClr val="FFFFFF"/>
                 </a:solidFill>
-                <a:latin typeface="Calibri" pitchFamily="34" charset="0"/>
+                <a:latin typeface="Amiri" pitchFamily="2" charset="-78"/>
                 <a:ea typeface="Amiri" pitchFamily="2" charset="-78"/>
                 <a:cs typeface="Amiri" pitchFamily="2" charset="-78"/>
               </a:rPr>
@@ -22833,7 +22833,7 @@
                 <a:solidFill>
                   <a:srgbClr val="FFFFFF"/>
                 </a:solidFill>
-                <a:latin typeface="Calibri" pitchFamily="34" charset="0"/>
+                <a:latin typeface="Amiri" pitchFamily="2" charset="-78"/>
                 <a:ea typeface="Amiri" pitchFamily="2" charset="-78"/>
                 <a:cs typeface="Amiri" pitchFamily="2" charset="-78"/>
               </a:rPr>
@@ -22899,7 +22899,7 @@
                 <a:solidFill>
                   <a:srgbClr val="FFFFFF"/>
                 </a:solidFill>
-                <a:latin typeface="Calibri" pitchFamily="34" charset="0"/>
+                <a:latin typeface="Amiri" pitchFamily="2" charset="-78"/>
                 <a:ea typeface="Amiri" pitchFamily="2" charset="-78"/>
                 <a:cs typeface="Amiri" pitchFamily="2" charset="-78"/>
               </a:rPr>
@@ -22965,7 +22965,7 @@
                 <a:solidFill>
                   <a:srgbClr val="FFFFFF"/>
                 </a:solidFill>
-                <a:latin typeface="Calibri" pitchFamily="34" charset="0"/>
+                <a:latin typeface="Amiri" pitchFamily="2" charset="-78"/>
                 <a:ea typeface="Amiri" pitchFamily="2" charset="-78"/>
                 <a:cs typeface="Amiri" pitchFamily="2" charset="-78"/>
               </a:rPr>
@@ -23031,7 +23031,7 @@
                 <a:solidFill>
                   <a:srgbClr val="FFFFFF"/>
                 </a:solidFill>
-                <a:latin typeface="Calibri" pitchFamily="34" charset="0"/>
+                <a:latin typeface="Amiri" pitchFamily="2" charset="-78"/>
                 <a:ea typeface="Amiri" pitchFamily="2" charset="-78"/>
                 <a:cs typeface="Amiri" pitchFamily="2" charset="-78"/>
               </a:rPr>
